--- a/lecture_notes/chapter8/lecture18/spelling_bee.pptx
+++ b/lecture_notes/chapter8/lecture18/spelling_bee.pptx
@@ -3339,8 +3339,8 @@
         </p:nvSpPr>
         <p:spPr>
           <a:xfrm>
-            <a:off x="838200" y="0"/>
-            <a:ext cx="10515600" cy="1325563"/>
+            <a:off x="96520" y="0"/>
+            <a:ext cx="7879080" cy="1325563"/>
           </a:xfrm>
         </p:spPr>
         <p:txBody>
@@ -3348,8 +3348,19 @@
           <a:lstStyle/>
           <a:p>
             <a:r>
+              <a:rPr lang="en-US" b="1" dirty="0"/>
+              <a:t>Spelling Bee</a:t>
+            </a:r>
+            <a:r>
               <a:rPr lang="en-US" dirty="0"/>
-              <a:t>How Many Words Can you Find?</a:t>
+              <a:t>: How Many Words  </a:t>
+            </a:r>
+            <a:br>
+              <a:rPr lang="en-US" dirty="0"/>
+            </a:br>
+            <a:r>
+              <a:rPr lang="en-US" dirty="0"/>
+              <a:t>                             Can you Find?</a:t>
             </a:r>
           </a:p>
         </p:txBody>
@@ -3376,8 +3387,8 @@
         </p:blipFill>
         <p:spPr>
           <a:xfrm>
-            <a:off x="8236248" y="797784"/>
-            <a:ext cx="3594100" cy="5499100"/>
+            <a:off x="8577864" y="147767"/>
+            <a:ext cx="2811496" cy="4301689"/>
           </a:xfrm>
           <a:prstGeom prst="rect">
             <a:avLst/>
@@ -3398,7 +3409,7 @@
         </p:nvSpPr>
         <p:spPr>
           <a:xfrm>
-            <a:off x="838200" y="1026768"/>
+            <a:off x="802640" y="1072171"/>
             <a:ext cx="6119111" cy="1477328"/>
           </a:xfrm>
           <a:prstGeom prst="rect">
@@ -3423,12 +3434,8 @@
               <a:buChar char="•"/>
             </a:pPr>
             <a:r>
-              <a:rPr lang="en-US"/>
-              <a:t>Must be </a:t>
-            </a:r>
-            <a:r>
               <a:rPr lang="en-US" dirty="0"/>
-              <a:t>4 or more letters</a:t>
+              <a:t>Must be 4 or more letters</a:t>
             </a:r>
           </a:p>
           <a:p>
@@ -3477,7 +3484,7 @@
         </p:nvSpPr>
         <p:spPr>
           <a:xfrm>
-            <a:off x="767080" y="2621195"/>
+            <a:off x="731520" y="2666598"/>
             <a:ext cx="6767456" cy="3970318"/>
           </a:xfrm>
           <a:prstGeom prst="rect">
@@ -3643,6 +3650,119 @@
               <a:effectLst/>
               <a:latin typeface="system-ui"/>
             </a:endParaRPr>
+          </a:p>
+        </p:txBody>
+      </p:sp>
+      <p:pic>
+        <p:nvPicPr>
+          <p:cNvPr id="10" name="Picture 9">
+            <a:extLst>
+              <a:ext uri="{FF2B5EF4-FFF2-40B4-BE49-F238E27FC236}">
+                <a16:creationId xmlns:a16="http://schemas.microsoft.com/office/drawing/2014/main" id="{DB896780-61E4-FC1E-356F-4F091115F397}"/>
+              </a:ext>
+            </a:extLst>
+          </p:cNvPr>
+          <p:cNvPicPr>
+            <a:picLocks noChangeAspect="1"/>
+          </p:cNvPicPr>
+          <p:nvPr/>
+        </p:nvPicPr>
+        <p:blipFill>
+          <a:blip r:embed="rId3"/>
+          <a:stretch>
+            <a:fillRect/>
+          </a:stretch>
+        </p:blipFill>
+        <p:spPr>
+          <a:xfrm>
+            <a:off x="9875520" y="4819863"/>
+            <a:ext cx="1695450" cy="1771650"/>
+          </a:xfrm>
+          <a:prstGeom prst="rect">
+            <a:avLst/>
+          </a:prstGeom>
+        </p:spPr>
+      </p:pic>
+      <p:sp>
+        <p:nvSpPr>
+          <p:cNvPr id="11" name="TextBox 10">
+            <a:extLst>
+              <a:ext uri="{FF2B5EF4-FFF2-40B4-BE49-F238E27FC236}">
+                <a16:creationId xmlns:a16="http://schemas.microsoft.com/office/drawing/2014/main" id="{DC00B40D-A602-C2A1-BDB7-BD9A242CAE23}"/>
+              </a:ext>
+            </a:extLst>
+          </p:cNvPr>
+          <p:cNvSpPr txBox="1"/>
+          <p:nvPr/>
+        </p:nvSpPr>
+        <p:spPr>
+          <a:xfrm>
+            <a:off x="8530216" y="5444078"/>
+            <a:ext cx="1345304" cy="523220"/>
+          </a:xfrm>
+          <a:prstGeom prst="rect">
+            <a:avLst/>
+          </a:prstGeom>
+          <a:noFill/>
+        </p:spPr>
+        <p:txBody>
+          <a:bodyPr wrap="square" rtlCol="0">
+            <a:spAutoFit/>
+          </a:bodyPr>
+          <a:lstStyle/>
+          <a:p>
+            <a:pPr algn="ctr"/>
+            <a:r>
+              <a:rPr lang="en-US" sz="1400" dirty="0"/>
+              <a:t>test your code with this</a:t>
+            </a:r>
+          </a:p>
+        </p:txBody>
+      </p:sp>
+      <p:sp>
+        <p:nvSpPr>
+          <p:cNvPr id="12" name="Rectangle 11">
+            <a:extLst>
+              <a:ext uri="{FF2B5EF4-FFF2-40B4-BE49-F238E27FC236}">
+                <a16:creationId xmlns:a16="http://schemas.microsoft.com/office/drawing/2014/main" id="{238AFB32-CF33-A4A1-C441-E993B35C1B66}"/>
+              </a:ext>
+            </a:extLst>
+          </p:cNvPr>
+          <p:cNvSpPr/>
+          <p:nvPr/>
+        </p:nvSpPr>
+        <p:spPr>
+          <a:xfrm>
+            <a:off x="8530216" y="4682416"/>
+            <a:ext cx="3661784" cy="2175583"/>
+          </a:xfrm>
+          <a:prstGeom prst="rect">
+            <a:avLst/>
+          </a:prstGeom>
+          <a:noFill/>
+        </p:spPr>
+        <p:style>
+          <a:lnRef idx="2">
+            <a:schemeClr val="accent1">
+              <a:shade val="15000"/>
+            </a:schemeClr>
+          </a:lnRef>
+          <a:fillRef idx="1">
+            <a:schemeClr val="accent1"/>
+          </a:fillRef>
+          <a:effectRef idx="0">
+            <a:schemeClr val="accent1"/>
+          </a:effectRef>
+          <a:fontRef idx="minor">
+            <a:schemeClr val="lt1"/>
+          </a:fontRef>
+        </p:style>
+        <p:txBody>
+          <a:bodyPr rtlCol="0" anchor="ctr"/>
+          <a:lstStyle/>
+          <a:p>
+            <a:pPr algn="ctr"/>
+            <a:endParaRPr lang="en-US" dirty="0"/>
           </a:p>
         </p:txBody>
       </p:sp>
